--- a/Presentation_Ethical_Sustainable_AI.pptx
+++ b/Presentation_Ethical_Sustainable_AI.pptx
@@ -3622,7 +3622,7 @@
         <p:spPr>
           <a:xfrm>
             <a:off x="457200" y="1371600"/>
-            <a:ext cx="11247120" cy="5029200"/>
+            <a:ext cx="11247120" cy="4555093"/>
           </a:xfrm>
           <a:prstGeom prst="rect">
             <a:avLst/>
@@ -3646,6 +3646,7 @@
               </a:defRPr>
             </a:pPr>
             <a:r>
+              <a:rPr dirty="0"/>
               <a:t>• Military scenarios show highest risk (0.85) and lowest ethical scores (58.3) — demand strict human oversight</a:t>
             </a:r>
           </a:p>
@@ -3661,8 +3662,14 @@
               </a:defRPr>
             </a:pPr>
             <a:r>
-              <a:t>• Image generation consumes 50× more energy than text; video generation is the most resource-intensive modality</a:t>
-            </a:r>
+              <a:rPr dirty="0"/>
+              <a:t>• </a:t>
+            </a:r>
+            <a:r>
+              <a:rPr lang="en-US" dirty="0"/>
+              <a:t> Image generation consumes ~50× more energy than text; estimated video generation shows highest per-unit impact</a:t>
+            </a:r>
+            <a:endParaRPr dirty="0"/>
           </a:p>
           <a:p>
             <a:pPr>
@@ -3676,8 +3683,14 @@
               </a:defRPr>
             </a:pPr>
             <a:r>
-              <a:t>• Llama-3 achieves best RAI score (85.4) with 60% lower energy than GPT-4, validating open-source efficiency</a:t>
-            </a:r>
+              <a:rPr dirty="0"/>
+              <a:t>• </a:t>
+            </a:r>
+            <a:r>
+              <a:rPr lang="en-US" dirty="0"/>
+              <a:t> Llama-3 achieves best environmental efficiency with 50% lower energy than GPT-4, though its RAI score (73.9) is moderated by higher residual bias</a:t>
+            </a:r>
+            <a:endParaRPr dirty="0"/>
           </a:p>
           <a:p>
             <a:pPr>
@@ -3691,6 +3704,7 @@
               </a:defRPr>
             </a:pPr>
             <a:r>
+              <a:rPr dirty="0"/>
               <a:t>• Geographic load shifting from coal to renewable grids reduces carbon by 93.75% without hardware changes</a:t>
             </a:r>
           </a:p>
@@ -3706,8 +3720,14 @@
               </a:defRPr>
             </a:pPr>
             <a:r>
-              <a:t>• 34% of policy recommendations contain subtle demographic biases invisible to surface-level fairness metrics</a:t>
-            </a:r>
+              <a:rPr dirty="0"/>
+              <a:t>• </a:t>
+            </a:r>
+            <a:r>
+              <a:rPr lang="en-US" dirty="0"/>
+              <a:t>  34% of simulated policy recommendations exhibited subtle demographic biases invisible to surface-level fairness metrics</a:t>
+            </a:r>
+            <a:endParaRPr dirty="0"/>
           </a:p>
           <a:p>
             <a:pPr>
@@ -3721,6 +3741,7 @@
               </a:defRPr>
             </a:pPr>
             <a:r>
+              <a:rPr dirty="0"/>
               <a:t>• Inference (not training) dominates lifecycle costs (80-90%) — optimization must focus on deployment efficiency</a:t>
             </a:r>
           </a:p>
@@ -4425,7 +4446,7 @@
         <p:spPr>
           <a:xfrm>
             <a:off x="457200" y="1371600"/>
-            <a:ext cx="11247120" cy="5029200"/>
+            <a:ext cx="11247120" cy="2708434"/>
           </a:xfrm>
           <a:prstGeom prst="rect">
             <a:avLst/>
@@ -4449,6 +4470,7 @@
               </a:defRPr>
             </a:pPr>
             <a:r>
+              <a:rPr dirty="0"/>
               <a:t>• Develop a unified Responsible AI (RAI) scoring model combining Ethics + Environment + Transparency</a:t>
             </a:r>
           </a:p>
@@ -4464,6 +4486,7 @@
               </a:defRPr>
             </a:pPr>
             <a:r>
+              <a:rPr dirty="0"/>
               <a:t>• Propose Ethical Risk Modeling with Bias Score (B), Explainability Score (X), and Decision Risk Factor (D)</a:t>
             </a:r>
           </a:p>
@@ -4479,7 +4502,16 @@
               </a:defRPr>
             </a:pPr>
             <a:r>
-              <a:t>• Quantify environmental impact across energy (kWh), water (liters), and carbon (kgCO₂e) footprints</a:t>
+              <a:rPr dirty="0"/>
+              <a:t>• Quantify environmental impact across energy (kWh), water (liters), and carbon (</a:t>
+            </a:r>
+            <a:r>
+              <a:rPr dirty="0" err="1"/>
+              <a:t>kgCO₂e</a:t>
+            </a:r>
+            <a:r>
+              <a:rPr dirty="0"/>
+              <a:t>) footprints</a:t>
             </a:r>
           </a:p>
           <a:p>
@@ -4494,7 +4526,8 @@
               </a:defRPr>
             </a:pPr>
             <a:r>
-              <a:t>• Validate framework across 150 high-stakes tactical scenarios: Military, Crisis, Policy, Medical, Financial</a:t>
+              <a:rPr dirty="0"/>
+              <a:t>• Validate framework across 150 high-stakes tactical scenarios: Military, Crisis, Policy</a:t>
             </a:r>
           </a:p>
           <a:p>
@@ -4509,8 +4542,14 @@
               </a:defRPr>
             </a:pPr>
             <a:r>
-              <a:t>• Provide optimization strategies achieving 28.3% carbon reduction and 31.7% water reduction</a:t>
-            </a:r>
+              <a:rPr dirty="0"/>
+              <a:t>• </a:t>
+            </a:r>
+            <a:r>
+              <a:rPr lang="en-US" dirty="0"/>
+              <a:t> Provide optimization strategies projected to achieve substantial carbon and water footprint reductions</a:t>
+            </a:r>
+            <a:endParaRPr dirty="0"/>
           </a:p>
           <a:p>
             <a:pPr>
@@ -4524,6 +4563,7 @@
               </a:defRPr>
             </a:pPr>
             <a:r>
+              <a:rPr dirty="0"/>
               <a:t>• Align with ISO/IEC TR 20226:2025, EU AI Act, and UN Sustainable Development Goals</a:t>
             </a:r>
           </a:p>
@@ -4642,7 +4682,7 @@
         <p:spPr>
           <a:xfrm>
             <a:off x="457200" y="1371600"/>
-            <a:ext cx="11247120" cy="5029200"/>
+            <a:ext cx="11247120" cy="3477875"/>
           </a:xfrm>
           <a:prstGeom prst="rect">
             <a:avLst/>
@@ -4666,6 +4706,7 @@
               </a:defRPr>
             </a:pPr>
             <a:r>
+              <a:rPr dirty="0"/>
               <a:t>• Module 1 — Ethical Risk Modeling: NLP-based bias detection, LIME explainability, hierarchical risk classification</a:t>
             </a:r>
           </a:p>
@@ -4681,6 +4722,7 @@
               </a:defRPr>
             </a:pPr>
             <a:r>
+              <a:rPr dirty="0"/>
               <a:t>• Module 2 — Environmental Impact Estimation: PUE/WUE metrics, GPU energy modeling, regional carbon intensity mapping</a:t>
             </a:r>
           </a:p>
@@ -4696,7 +4738,36 @@
               </a:defRPr>
             </a:pPr>
             <a:r>
-              <a:t>• Module 3 — Responsible AI Scoring: RAI = w₁E + w₂S + w₃T (weighted aggregation with AHP-derived coefficients)</a:t>
+              <a:rPr dirty="0"/>
+              <a:t>• </a:t>
+            </a:r>
+            <a:r>
+              <a:rPr lang="en-US" dirty="0"/>
+              <a:t> Module 3 — Responsible AI Scoring: RAI = </a:t>
+            </a:r>
+            <a:r>
+              <a:rPr lang="en-US" dirty="0" err="1"/>
+              <a:t>w₁E</a:t>
+            </a:r>
+            <a:r>
+              <a:rPr lang="en-US" dirty="0"/>
+              <a:t> + </a:t>
+            </a:r>
+            <a:r>
+              <a:rPr lang="en-US" dirty="0" err="1"/>
+              <a:t>w₂S</a:t>
+            </a:r>
+            <a:r>
+              <a:rPr lang="en-US" dirty="0"/>
+              <a:t> + </a:t>
+            </a:r>
+            <a:r>
+              <a:rPr lang="en-US" dirty="0" err="1"/>
+              <a:t>w₃T</a:t>
+            </a:r>
+            <a:r>
+              <a:rPr lang="en-US" dirty="0"/>
+              <a:t> (weighted aggregation with literature-grounded coefficients)</a:t>
             </a:r>
           </a:p>
           <a:p>
@@ -4711,7 +4782,8 @@
               </a:defRPr>
             </a:pPr>
             <a:r>
-              <a:t>• Module 4 — Tactical Scenario Simulation: Military, Crisis Response, Policy, Medical, and Financial domains</a:t>
+              <a:rPr dirty="0"/>
+              <a:t>• Module 4 — Tactical Scenario Simulation: Military, Crisis Response, Policy domains</a:t>
             </a:r>
           </a:p>
           <a:p>
@@ -4726,6 +4798,7 @@
               </a:defRPr>
             </a:pPr>
             <a:r>
+              <a:rPr dirty="0"/>
               <a:t>• System Pipeline: Scenario Input → AI Output → Ethical Analysis → Resource Estimation → Scoring → Recommendations</a:t>
             </a:r>
           </a:p>
